--- a/trabalho final/Apresentação Francisco Davi revA.pptx
+++ b/trabalho final/Apresentação Francisco Davi revA.pptx
@@ -9042,6 +9042,42 @@
           </a:p>
         </p:txBody>
       </p:sp>
+      <p:pic>
+        <p:nvPicPr>
+          <p:cNvPr id="3" name="Picture 2" descr="A graph with lines and numbers&#10;&#10;AI-generated content may be incorrect.">
+            <a:extLst>
+              <a:ext uri="{FF2B5EF4-FFF2-40B4-BE49-F238E27FC236}">
+                <a16:creationId xmlns:a16="http://schemas.microsoft.com/office/drawing/2014/main" id="{81DE08E1-CFBE-7062-CF09-DCFBEFF8E2C2}"/>
+              </a:ext>
+            </a:extLst>
+          </p:cNvPr>
+          <p:cNvPicPr>
+            <a:picLocks noChangeAspect="1"/>
+          </p:cNvPicPr>
+          <p:nvPr/>
+        </p:nvPicPr>
+        <p:blipFill>
+          <a:blip r:embed="rId3" cstate="print">
+            <a:extLst>
+              <a:ext uri="{28A0092B-C50C-407E-A947-70E740481C1C}">
+                <a14:useLocalDpi xmlns:a14="http://schemas.microsoft.com/office/drawing/2010/main" val="0"/>
+              </a:ext>
+            </a:extLst>
+          </a:blip>
+          <a:stretch>
+            <a:fillRect/>
+          </a:stretch>
+        </p:blipFill>
+        <p:spPr>
+          <a:xfrm>
+            <a:off x="31900" y="1049009"/>
+            <a:ext cx="6974958" cy="4359348"/>
+          </a:xfrm>
+          <a:prstGeom prst="rect">
+            <a:avLst/>
+          </a:prstGeom>
+        </p:spPr>
+      </p:pic>
     </p:spTree>
     <p:extLst>
       <p:ext uri="{BB962C8B-B14F-4D97-AF65-F5344CB8AC3E}">
@@ -9525,6 +9561,42 @@
           </a:p>
         </p:txBody>
       </p:sp>
+      <p:pic>
+        <p:nvPicPr>
+          <p:cNvPr id="3" name="Picture 2" descr="A graph of a number of different colored lines&#10;&#10;AI-generated content may be incorrect.">
+            <a:extLst>
+              <a:ext uri="{FF2B5EF4-FFF2-40B4-BE49-F238E27FC236}">
+                <a16:creationId xmlns:a16="http://schemas.microsoft.com/office/drawing/2014/main" id="{E2A2568F-6A8D-6724-26E0-BD38389BC48A}"/>
+              </a:ext>
+            </a:extLst>
+          </p:cNvPr>
+          <p:cNvPicPr>
+            <a:picLocks noChangeAspect="1"/>
+          </p:cNvPicPr>
+          <p:nvPr/>
+        </p:nvPicPr>
+        <p:blipFill>
+          <a:blip r:embed="rId3" cstate="print">
+            <a:extLst>
+              <a:ext uri="{28A0092B-C50C-407E-A947-70E740481C1C}">
+                <a14:useLocalDpi xmlns:a14="http://schemas.microsoft.com/office/drawing/2010/main" val="0"/>
+              </a:ext>
+            </a:extLst>
+          </a:blip>
+          <a:stretch>
+            <a:fillRect/>
+          </a:stretch>
+        </p:blipFill>
+        <p:spPr>
+          <a:xfrm>
+            <a:off x="116957" y="976117"/>
+            <a:ext cx="6982111" cy="4363819"/>
+          </a:xfrm>
+          <a:prstGeom prst="rect">
+            <a:avLst/>
+          </a:prstGeom>
+        </p:spPr>
+      </p:pic>
     </p:spTree>
     <p:extLst>
       <p:ext uri="{BB962C8B-B14F-4D97-AF65-F5344CB8AC3E}">
@@ -10543,10 +10615,10 @@
       </p:sp>
       <p:pic>
         <p:nvPicPr>
-          <p:cNvPr id="4" name="Picture 3" descr="A graph of a number of different colored lines&#10;&#10;AI-generated content may be incorrect.">
+          <p:cNvPr id="3" name="Picture 2" descr="A graph of a number of different colored lines&#10;&#10;AI-generated content may be incorrect.">
             <a:extLst>
               <a:ext uri="{FF2B5EF4-FFF2-40B4-BE49-F238E27FC236}">
-                <a16:creationId xmlns:a16="http://schemas.microsoft.com/office/drawing/2014/main" id="{9AD99475-AECC-6943-096F-19484F21348F}"/>
+                <a16:creationId xmlns:a16="http://schemas.microsoft.com/office/drawing/2014/main" id="{2027B7E9-8E07-47A5-14F5-C5218F33808D}"/>
               </a:ext>
             </a:extLst>
           </p:cNvPr>
@@ -10569,7 +10641,7 @@
         </p:blipFill>
         <p:spPr>
           <a:xfrm>
-            <a:off x="0" y="815467"/>
+            <a:off x="-1" y="801319"/>
             <a:ext cx="7099069" cy="4436918"/>
           </a:xfrm>
           <a:prstGeom prst="rect">
@@ -11062,10 +11134,10 @@
       </p:sp>
       <p:pic>
         <p:nvPicPr>
-          <p:cNvPr id="3" name="Picture 2" descr="A graph of different colored lines&#10;&#10;AI-generated content may be incorrect.">
+          <p:cNvPr id="4" name="Picture 3" descr="A graph of different colored lines&#10;&#10;AI-generated content may be incorrect.">
             <a:extLst>
               <a:ext uri="{FF2B5EF4-FFF2-40B4-BE49-F238E27FC236}">
-                <a16:creationId xmlns:a16="http://schemas.microsoft.com/office/drawing/2014/main" id="{57A64A4A-2C4F-1D2F-482E-6FE7B8BA9D8E}"/>
+                <a16:creationId xmlns:a16="http://schemas.microsoft.com/office/drawing/2014/main" id="{0E4221D0-114F-D6E2-3A18-7482646E373D}"/>
               </a:ext>
             </a:extLst>
           </p:cNvPr>
@@ -11088,8 +11160,8 @@
         </p:blipFill>
         <p:spPr>
           <a:xfrm>
-            <a:off x="0" y="782026"/>
-            <a:ext cx="7154588" cy="4471617"/>
+            <a:off x="1" y="912115"/>
+            <a:ext cx="7006856" cy="4379285"/>
           </a:xfrm>
           <a:prstGeom prst="rect">
             <a:avLst/>
@@ -12100,10 +12172,10 @@
       </p:sp>
       <p:pic>
         <p:nvPicPr>
-          <p:cNvPr id="3" name="Picture 2" descr="A graph with lines and numbers&#10;&#10;AI-generated content may be incorrect.">
+          <p:cNvPr id="2" name="Picture 1" descr="A graph with lines and numbers&#10;&#10;AI-generated content may be incorrect.">
             <a:extLst>
               <a:ext uri="{FF2B5EF4-FFF2-40B4-BE49-F238E27FC236}">
-                <a16:creationId xmlns:a16="http://schemas.microsoft.com/office/drawing/2014/main" id="{F6B150BD-D02A-5577-1BD2-D81DE6CF05EF}"/>
+                <a16:creationId xmlns:a16="http://schemas.microsoft.com/office/drawing/2014/main" id="{6A2C69CC-09B0-379D-F004-F3D27DA30964}"/>
               </a:ext>
             </a:extLst>
           </p:cNvPr>
@@ -12126,8 +12198,8 @@
         </p:blipFill>
         <p:spPr>
           <a:xfrm>
-            <a:off x="0" y="874283"/>
-            <a:ext cx="6994985" cy="4371865"/>
+            <a:off x="0" y="751051"/>
+            <a:ext cx="7099069" cy="4436918"/>
           </a:xfrm>
           <a:prstGeom prst="rect">
             <a:avLst/>
@@ -12619,10 +12691,10 @@
       </p:sp>
       <p:pic>
         <p:nvPicPr>
-          <p:cNvPr id="4" name="Picture 3" descr="A graph of different colored lines&#10;&#10;AI-generated content may be incorrect.">
+          <p:cNvPr id="7" name="Picture 6" descr="A graph with different colored lines&#10;&#10;AI-generated content may be incorrect.">
             <a:extLst>
               <a:ext uri="{FF2B5EF4-FFF2-40B4-BE49-F238E27FC236}">
-                <a16:creationId xmlns:a16="http://schemas.microsoft.com/office/drawing/2014/main" id="{A6E44843-3663-28D5-55D8-7AB21809E009}"/>
+                <a16:creationId xmlns:a16="http://schemas.microsoft.com/office/drawing/2014/main" id="{FD48A22F-7C26-42DD-544B-6C421240BD35}"/>
               </a:ext>
             </a:extLst>
           </p:cNvPr>
@@ -12645,7 +12717,7 @@
         </p:blipFill>
         <p:spPr>
           <a:xfrm>
-            <a:off x="0" y="832089"/>
+            <a:off x="0" y="751051"/>
             <a:ext cx="7099069" cy="4436918"/>
           </a:xfrm>
           <a:prstGeom prst="rect">
@@ -13474,7 +13546,25 @@
                 </a:solidFill>
                 <a:latin typeface="Arial"/>
               </a:rPr>
-              <a:t> x temp. topo se </a:t>
+              <a:t> x temp. </a:t>
+            </a:r>
+            <a:r>
+              <a:rPr lang="en-US">
+                <a:solidFill>
+                  <a:srgbClr val="000000"/>
+                </a:solidFill>
+                <a:latin typeface="Arial"/>
+              </a:rPr>
+              <a:t>fundo </a:t>
+            </a:r>
+            <a:r>
+              <a:rPr lang="en-US" dirty="0">
+                <a:solidFill>
+                  <a:srgbClr val="000000"/>
+                </a:solidFill>
+                <a:latin typeface="Arial"/>
+              </a:rPr>
+              <a:t>se </a:t>
             </a:r>
             <a:r>
               <a:rPr lang="en-US" dirty="0" err="1">
